--- a/CIP/CIP_EtherNetIP_Attack_Defend_Poster.pptx
+++ b/CIP/CIP_EtherNetIP_Attack_Defend_Poster.pptx
@@ -11377,7 +11377,7 @@
                 </a:solidFill>
                 <a:latin typeface="Segoe UI"/>
               </a:rPr>
-              <a:t>Lab reference only — exercise against equipment you are authorised to test. CIP writes move physical process. No client data.</a:t>
+              <a:t>Lab reference only — exercise against equipment you are authorised to test. CIP writes move physical process.</a:t>
             </a:r>
           </a:p>
         </p:txBody>
